--- a/downloads/DCT_V1_Ch16_Slides.pptx
+++ b/downloads/DCT_V1_Ch16_Slides.pptx
@@ -129,7 +129,7 @@
   <p:extLst>
     <p:ext uri="{521415D9-36F7-43E2-AB2F-B90AF26B5E84}">
       <p14:sectionLst xmlns:p14="http://schemas.microsoft.com/office/powerpoint/2010/main">
-        <p14:section name="Opening" id="{97a94b1f-b09a-bd63-00bd-db7f6d2a65bf}">
+        <p14:section name="Opening" id="{bbfe5859-8c8d-1c43-b5d6-926779205a2c}">
           <p14:sldIdLst>
             <p14:sldId id="256"/>
             <p14:sldId id="257"/>
@@ -137,45 +137,45 @@
             <p14:sldId id="259"/>
           </p14:sldIdLst>
         </p14:section>
-        <p14:section name="16.1 The Arc of Volume I" id="{09d10466-6b14-5213-aa60-66798137ca05}">
+        <p14:section name="16.1 The Arc of Volume I" id="{d4f053e9-37e2-f770-0587-d506ffabc0cd}">
           <p14:sldIdLst>
             <p14:sldId id="260"/>
           </p14:sldIdLst>
         </p14:section>
-        <p14:section name="16.2 What the Framework Guarantees" id="{157b1219-e167-f0fe-cbeb-29764f37b53b}">
+        <p14:section name="16.2 What the Framework Guarantees" id="{7634e4c7-296a-b546-87df-392a2a9b3abb}">
           <p14:sldIdLst>
             <p14:sldId id="261"/>
           </p14:sldIdLst>
         </p14:section>
-        <p14:section name="16.3 Transformation, Stated Once" id="{21e89be0-d6ec-d1b5-e51a-5d6b9cbdde05}">
+        <p14:section name="16.3 Transformation, Stated Once" id="{cfa22430-71f6-936c-c479-87403be34566}">
           <p14:sldIdLst>
             <p14:sldId id="262"/>
           </p14:sldIdLst>
         </p14:section>
-        <p14:section name="16.4 Are We Ready to Optimize?" id="{2ee80aaf-717e-76b4-8962-d30d3e65906a}">
+        <p14:section name="16.4 Are We Ready to Optimize?" id="{51e57c75-8a7f-dff6-195f-e4b106cd39e0}">
           <p14:sldIdLst>
             <p14:sldId id="263"/>
             <p14:sldId id="264"/>
           </p14:sldIdLst>
         </p14:section>
-        <p14:section name="16.5 Modularity: How the Framework Grows" id="{7218234e-596f-7033-bacf-d30701cdaa63}">
+        <p14:section name="16.5 Modularity: How the Framework Grows" id="{9e99079d-3a30-35aa-e1d4-5eca8075cb40}">
           <p14:sldIdLst>
             <p14:sldId id="265"/>
             <p14:sldId id="266"/>
           </p14:sldIdLst>
         </p14:section>
-        <p14:section name="16.6 Computation, AI, Twins, and Autonomy" id="{838ef504-1360-9d5d-c3df-cacaea427e61}">
+        <p14:section name="16.6 Computation, AI, Twins, and Autonomy" id="{101774bf-7f6e-4832-afa6-e2f565ca305c}">
           <p14:sldIdLst>
             <p14:sldId id="267"/>
           </p14:sldIdLst>
         </p14:section>
-        <p14:section name="16.7 Open Problems and the Road to Volume II" id="{764927e6-78d2-4a11-d6a9-3ed907434534}">
+        <p14:section name="16.7 Open Problems and the Road to Volume II" id="{66328609-5aee-9ec0-034f-8db127996a05}">
           <p14:sldIdLst>
             <p14:sldId id="268"/>
             <p14:sldId id="269"/>
           </p14:sldIdLst>
         </p14:section>
-        <p14:section name="Worked Example 16.1" id="{597f2eae-1019-8850-e638-cbeee5995869}">
+        <p14:section name="Worked Example 16.1" id="{6c1cc363-8f30-65ff-b20d-cfc3e998d854}">
           <p14:sldIdLst>
             <p14:sldId id="270"/>
             <p14:sldId id="271"/>
@@ -184,12 +184,12 @@
             <p14:sldId id="274"/>
           </p14:sldIdLst>
         </p14:section>
-        <p14:section name="AXIOM Lab 1.16" id="{fba6b1d3-8306-f244-8ded-1a7cf05efc5d}">
+        <p14:section name="AXIOM Lab 1.16" id="{7b32d1ec-578d-59af-cc6b-2157d96c67ec}">
           <p14:sldIdLst>
             <p14:sldId id="275"/>
           </p14:sldIdLst>
         </p14:section>
-        <p14:section name="Close" id="{d7b0334d-96ae-f76c-2db9-ff8ac4d5be01}">
+        <p14:section name="Close" id="{e32cd3a0-adb8-2870-9b1d-8828103cf7fa}">
           <p14:sldIdLst>
             <p14:sldId id="276"/>
             <p14:sldId id="277"/>

--- a/downloads/DCT_V1_Ch16_Slides.pptx
+++ b/downloads/DCT_V1_Ch16_Slides.pptx
@@ -129,7 +129,7 @@
   <p:extLst>
     <p:ext uri="{521415D9-36F7-43E2-AB2F-B90AF26B5E84}">
       <p14:sectionLst xmlns:p14="http://schemas.microsoft.com/office/powerpoint/2010/main">
-        <p14:section name="Opening" id="{bbfe5859-8c8d-1c43-b5d6-926779205a2c}">
+        <p14:section name="Opening" id="{adbdc4fe-192b-9553-f9fa-c535744aa5fb}">
           <p14:sldIdLst>
             <p14:sldId id="256"/>
             <p14:sldId id="257"/>
@@ -137,45 +137,45 @@
             <p14:sldId id="259"/>
           </p14:sldIdLst>
         </p14:section>
-        <p14:section name="16.1 The Arc of Volume I" id="{d4f053e9-37e2-f770-0587-d506ffabc0cd}">
+        <p14:section name="16.1 The Arc of Volume I" id="{dc7a1525-ee7e-e813-1af3-4b1938b168e1}">
           <p14:sldIdLst>
             <p14:sldId id="260"/>
           </p14:sldIdLst>
         </p14:section>
-        <p14:section name="16.2 What the Framework Guarantees" id="{7634e4c7-296a-b546-87df-392a2a9b3abb}">
+        <p14:section name="16.2 What the Framework Guarantees" id="{6d89218e-0693-0bb0-ac4b-f32588806a47}">
           <p14:sldIdLst>
             <p14:sldId id="261"/>
           </p14:sldIdLst>
         </p14:section>
-        <p14:section name="16.3 Transformation, Stated Once" id="{cfa22430-71f6-936c-c479-87403be34566}">
+        <p14:section name="16.3 Transformation, Stated Once" id="{db162180-a5a2-03c5-4b93-a54f00949c24}">
           <p14:sldIdLst>
             <p14:sldId id="262"/>
           </p14:sldIdLst>
         </p14:section>
-        <p14:section name="16.4 Are We Ready to Optimize?" id="{51e57c75-8a7f-dff6-195f-e4b106cd39e0}">
+        <p14:section name="16.4 Are We Ready to Optimize?" id="{4246d9d2-3860-1e9d-6d5f-fd5364f0d544}">
           <p14:sldIdLst>
             <p14:sldId id="263"/>
             <p14:sldId id="264"/>
           </p14:sldIdLst>
         </p14:section>
-        <p14:section name="16.5 Modularity: How the Framework Grows" id="{9e99079d-3a30-35aa-e1d4-5eca8075cb40}">
+        <p14:section name="16.5 Modularity: How the Framework Grows" id="{4906c428-d8cd-66a2-3c06-2d4e19def00a}">
           <p14:sldIdLst>
             <p14:sldId id="265"/>
             <p14:sldId id="266"/>
           </p14:sldIdLst>
         </p14:section>
-        <p14:section name="16.6 Computation, AI, Twins, and Autonomy" id="{101774bf-7f6e-4832-afa6-e2f565ca305c}">
+        <p14:section name="16.6 Computation, AI, Twins, and Autonomy" id="{e21fc1c6-44c4-7005-a1b4-6a598debe0c4}">
           <p14:sldIdLst>
             <p14:sldId id="267"/>
           </p14:sldIdLst>
         </p14:section>
-        <p14:section name="16.7 Open Problems and the Road to Volume II" id="{66328609-5aee-9ec0-034f-8db127996a05}">
+        <p14:section name="16.7 Open Problems and the Road to Volume II" id="{e7d4a723-4102-e9fc-7f99-2757a54b59ce}">
           <p14:sldIdLst>
             <p14:sldId id="268"/>
             <p14:sldId id="269"/>
           </p14:sldIdLst>
         </p14:section>
-        <p14:section name="Worked Example 16.1" id="{6c1cc363-8f30-65ff-b20d-cfc3e998d854}">
+        <p14:section name="Worked Example 16.1" id="{acde8ac1-e2b5-5f4a-7b63-904d778f4415}">
           <p14:sldIdLst>
             <p14:sldId id="270"/>
             <p14:sldId id="271"/>
@@ -184,12 +184,12 @@
             <p14:sldId id="274"/>
           </p14:sldIdLst>
         </p14:section>
-        <p14:section name="AXIOM Lab 1.16" id="{7b32d1ec-578d-59af-cc6b-2157d96c67ec}">
+        <p14:section name="AXIOM Lab 1.16" id="{d4c3b31d-6704-19cd-1be7-ebf27a22b1bf}">
           <p14:sldIdLst>
             <p14:sldId id="275"/>
           </p14:sldIdLst>
         </p14:section>
-        <p14:section name="Close" id="{e32cd3a0-adb8-2870-9b1d-8828103cf7fa}">
+        <p14:section name="Close" id="{47e319e8-b5a3-3f69-87ed-4fd0bbf16dda}">
           <p14:sldIdLst>
             <p14:sldId id="276"/>
             <p14:sldId id="277"/>
